--- a/examples/deck.pptx
+++ b/examples/deck.pptx
@@ -14452,7 +14452,7 @@
         </p:nvGraphicFramePr>
         <p:xfrm>
           <a:off x="365760" y="1133856"/>
-          <a:ext cx="11460477" cy="4232979"/>
+          <a:ext cx="11460477" cy="3749040"/>
         </p:xfrm>
         <a:graphic>
           <a:graphicData uri="http://schemas.openxmlformats.org/drawingml/2006/table">
@@ -14688,7 +14688,7 @@
                   <a:tcPr/>
                 </a:tc>
               </a:tr>
-              <a:tr h="517321">
+              <a:tr h="420624">
                 <a:tc>
                   <a:txBody>
                     <a:bodyPr wrap="square"/>
@@ -14828,7 +14828,7 @@
                   </a:tcPr>
                 </a:tc>
               </a:tr>
-              <a:tr h="517321">
+              <a:tr h="420624">
                 <a:tc>
                   <a:txBody>
                     <a:bodyPr wrap="square"/>
@@ -14968,7 +14968,7 @@
                   </a:tcPr>
                 </a:tc>
               </a:tr>
-              <a:tr h="340156">
+              <a:tr h="420624">
                 <a:tc>
                   <a:txBody>
                     <a:bodyPr wrap="square"/>
@@ -15108,7 +15108,7 @@
                   </a:tcPr>
                 </a:tc>
               </a:tr>
-              <a:tr h="517321">
+              <a:tr h="420624">
                 <a:tc>
                   <a:txBody>
                     <a:bodyPr wrap="square"/>
@@ -15248,7 +15248,7 @@
                   </a:tcPr>
                 </a:tc>
               </a:tr>
-              <a:tr h="340156">
+              <a:tr h="420624">
                 <a:tc>
                   <a:txBody>
                     <a:bodyPr wrap="square"/>
@@ -15388,7 +15388,7 @@
                   </a:tcPr>
                 </a:tc>
               </a:tr>
-              <a:tr h="340156">
+              <a:tr h="251460">
                 <a:tc>
                   <a:txBody>
                     <a:bodyPr wrap="square"/>
@@ -15608,7 +15608,7 @@
                   <a:tcPr/>
                 </a:tc>
               </a:tr>
-              <a:tr h="340156">
+              <a:tr h="251460">
                 <a:tc>
                   <a:txBody>
                     <a:bodyPr wrap="square"/>
@@ -15748,7 +15748,7 @@
                   </a:tcPr>
                 </a:tc>
               </a:tr>
-              <a:tr h="340156">
+              <a:tr h="251460">
                 <a:tc>
                   <a:txBody>
                     <a:bodyPr wrap="square"/>
@@ -15888,7 +15888,7 @@
                   </a:tcPr>
                 </a:tc>
               </a:tr>
-              <a:tr h="340156">
+              <a:tr h="251460">
                 <a:tc>
                   <a:txBody>
                     <a:bodyPr wrap="square"/>
@@ -16216,7 +16216,7 @@
         </p:nvGraphicFramePr>
         <p:xfrm>
           <a:off x="365760" y="1133856"/>
-          <a:ext cx="11460477" cy="4079817"/>
+          <a:ext cx="11460477" cy="3781044"/>
         </p:xfrm>
         <a:graphic>
           <a:graphicData uri="http://schemas.openxmlformats.org/drawingml/2006/table">
@@ -16452,7 +16452,7 @@
                   <a:tcPr/>
                 </a:tc>
               </a:tr>
-              <a:tr h="340156">
+              <a:tr h="251460">
                 <a:tc>
                   <a:txBody>
                     <a:bodyPr wrap="square"/>
@@ -16672,7 +16672,7 @@
                   <a:tcPr/>
                 </a:tc>
               </a:tr>
-              <a:tr h="340156">
+              <a:tr h="420624">
                 <a:tc>
                   <a:txBody>
                     <a:bodyPr wrap="square"/>
@@ -16812,7 +16812,7 @@
                   </a:tcPr>
                 </a:tc>
               </a:tr>
-              <a:tr h="340156">
+              <a:tr h="420624">
                 <a:tc>
                   <a:txBody>
                     <a:bodyPr wrap="square"/>
@@ -16952,7 +16952,7 @@
                   </a:tcPr>
                 </a:tc>
               </a:tr>
-              <a:tr h="340156">
+              <a:tr h="251460">
                 <a:tc>
                   <a:txBody>
                     <a:bodyPr wrap="square"/>
@@ -17092,7 +17092,7 @@
                   </a:tcPr>
                 </a:tc>
               </a:tr>
-              <a:tr h="340156">
+              <a:tr h="251460">
                 <a:tc>
                   <a:txBody>
                     <a:bodyPr wrap="square"/>
@@ -17312,7 +17312,7 @@
                   <a:tcPr/>
                 </a:tc>
               </a:tr>
-              <a:tr h="517321">
+              <a:tr h="420624">
                 <a:tc>
                   <a:txBody>
                     <a:bodyPr wrap="square"/>
@@ -17452,7 +17452,7 @@
                   </a:tcPr>
                 </a:tc>
               </a:tr>
-              <a:tr h="340156">
+              <a:tr h="251460">
                 <a:tc>
                   <a:txBody>
                     <a:bodyPr wrap="square"/>
@@ -17592,7 +17592,7 @@
                   </a:tcPr>
                 </a:tc>
               </a:tr>
-              <a:tr h="340156">
+              <a:tr h="251460">
                 <a:tc>
                   <a:txBody>
                     <a:bodyPr wrap="square"/>
@@ -17732,7 +17732,7 @@
                   </a:tcPr>
                 </a:tc>
               </a:tr>
-              <a:tr h="340156">
+              <a:tr h="420624">
                 <a:tc>
                   <a:txBody>
                     <a:bodyPr wrap="square"/>
@@ -21295,7 +21295,7 @@
         </p:nvGraphicFramePr>
         <p:xfrm>
           <a:off x="365760" y="1133856"/>
-          <a:ext cx="11460477" cy="5065776"/>
+          <a:ext cx="11460477" cy="4426458"/>
         </p:xfrm>
         <a:graphic>
           <a:graphicData uri="http://schemas.openxmlformats.org/drawingml/2006/table">
@@ -21531,7 +21531,7 @@
                   <a:tcPr/>
                 </a:tc>
               </a:tr>
-              <a:tr h="421005">
+              <a:tr h="401828">
                 <a:tc>
                   <a:txBody>
                     <a:bodyPr wrap="square"/>
@@ -21539,7 +21539,7 @@
                     <a:p>
                       <a:pPr algn="ctr"/>
                       <a:r>
-                        <a:rPr sz="900" b="1">
+                        <a:rPr sz="850" b="1">
                           <a:solidFill>
                             <a:srgbClr val="FFFFFF"/>
                           </a:solidFill>
@@ -21562,7 +21562,7 @@
                     <a:p>
                       <a:pPr algn="l"/>
                       <a:r>
-                        <a:rPr sz="900" b="0">
+                        <a:rPr sz="850" b="0">
                           <a:solidFill>
                             <a:srgbClr val="2B2E33"/>
                           </a:solidFill>
@@ -21585,7 +21585,7 @@
                     <a:p>
                       <a:pPr algn="l"/>
                       <a:r>
-                        <a:rPr sz="900" b="0">
+                        <a:rPr sz="850" b="0">
                           <a:solidFill>
                             <a:srgbClr val="2B2E33"/>
                           </a:solidFill>
@@ -21608,7 +21608,7 @@
                     <a:p>
                       <a:pPr algn="l"/>
                       <a:r>
-                        <a:rPr sz="900" b="0">
+                        <a:rPr sz="850" b="0">
                           <a:solidFill>
                             <a:srgbClr val="2B2E33"/>
                           </a:solidFill>
@@ -21631,7 +21631,7 @@
                     <a:p>
                       <a:pPr algn="l"/>
                       <a:r>
-                        <a:rPr sz="900" b="0">
+                        <a:rPr sz="850" b="0">
                           <a:solidFill>
                             <a:srgbClr val="2B2E33"/>
                           </a:solidFill>
@@ -21654,7 +21654,7 @@
                     <a:p>
                       <a:pPr algn="l"/>
                       <a:r>
-                        <a:rPr sz="900" b="0">
+                        <a:rPr sz="850" b="0">
                           <a:solidFill>
                             <a:srgbClr val="2B2E33"/>
                           </a:solidFill>
@@ -21671,7 +21671,7 @@
                   </a:tcPr>
                 </a:tc>
               </a:tr>
-              <a:tr h="421005">
+              <a:tr h="401828">
                 <a:tc>
                   <a:txBody>
                     <a:bodyPr wrap="square"/>
@@ -21679,7 +21679,7 @@
                     <a:p>
                       <a:pPr algn="ctr"/>
                       <a:r>
-                        <a:rPr sz="900" b="1">
+                        <a:rPr sz="850" b="1">
                           <a:solidFill>
                             <a:srgbClr val="FFFFFF"/>
                           </a:solidFill>
@@ -21702,7 +21702,7 @@
                     <a:p>
                       <a:pPr algn="l"/>
                       <a:r>
-                        <a:rPr sz="900" b="0">
+                        <a:rPr sz="850" b="0">
                           <a:solidFill>
                             <a:srgbClr val="2B2E33"/>
                           </a:solidFill>
@@ -21725,7 +21725,7 @@
                     <a:p>
                       <a:pPr algn="l"/>
                       <a:r>
-                        <a:rPr sz="900" b="0">
+                        <a:rPr sz="850" b="0">
                           <a:solidFill>
                             <a:srgbClr val="2B2E33"/>
                           </a:solidFill>
@@ -21748,7 +21748,7 @@
                     <a:p>
                       <a:pPr algn="l"/>
                       <a:r>
-                        <a:rPr sz="900" b="0">
+                        <a:rPr sz="850" b="0">
                           <a:solidFill>
                             <a:srgbClr val="2B2E33"/>
                           </a:solidFill>
@@ -21771,7 +21771,7 @@
                     <a:p>
                       <a:pPr algn="l"/>
                       <a:r>
-                        <a:rPr sz="900" b="0">
+                        <a:rPr sz="850" b="0">
                           <a:solidFill>
                             <a:srgbClr val="2B2E33"/>
                           </a:solidFill>
@@ -21794,7 +21794,7 @@
                     <a:p>
                       <a:pPr algn="l"/>
                       <a:r>
-                        <a:rPr sz="900" b="0">
+                        <a:rPr sz="850" b="0">
                           <a:solidFill>
                             <a:srgbClr val="2B2E33"/>
                           </a:solidFill>
@@ -21811,7 +21811,7 @@
                   </a:tcPr>
                 </a:tc>
               </a:tr>
-              <a:tr h="306705">
+              <a:tr h="242062">
                 <a:tc>
                   <a:txBody>
                     <a:bodyPr wrap="square"/>
@@ -21819,7 +21819,7 @@
                     <a:p>
                       <a:pPr algn="ctr"/>
                       <a:r>
-                        <a:rPr sz="900" b="1">
+                        <a:rPr sz="850" b="1">
                           <a:solidFill>
                             <a:srgbClr val="FFFFFF"/>
                           </a:solidFill>
@@ -21842,7 +21842,7 @@
                     <a:p>
                       <a:pPr algn="l"/>
                       <a:r>
-                        <a:rPr sz="900" b="0">
+                        <a:rPr sz="850" b="0">
                           <a:solidFill>
                             <a:srgbClr val="2B2E33"/>
                           </a:solidFill>
@@ -21865,7 +21865,7 @@
                     <a:p>
                       <a:pPr algn="l"/>
                       <a:r>
-                        <a:rPr sz="900" b="0">
+                        <a:rPr sz="850" b="0">
                           <a:solidFill>
                             <a:srgbClr val="2B2E33"/>
                           </a:solidFill>
@@ -21888,7 +21888,7 @@
                     <a:p>
                       <a:pPr algn="l"/>
                       <a:r>
-                        <a:rPr sz="900" b="0">
+                        <a:rPr sz="850" b="0">
                           <a:solidFill>
                             <a:srgbClr val="2B2E33"/>
                           </a:solidFill>
@@ -21911,7 +21911,7 @@
                     <a:p>
                       <a:pPr algn="l"/>
                       <a:r>
-                        <a:rPr sz="900" b="0">
+                        <a:rPr sz="850" b="0">
                           <a:solidFill>
                             <a:srgbClr val="2B2E33"/>
                           </a:solidFill>
@@ -21934,7 +21934,7 @@
                     <a:p>
                       <a:pPr algn="l"/>
                       <a:r>
-                        <a:rPr sz="900" b="0">
+                        <a:rPr sz="850" b="0">
                           <a:solidFill>
                             <a:srgbClr val="2B2E33"/>
                           </a:solidFill>
@@ -22031,7 +22031,7 @@
                   <a:tcPr/>
                 </a:tc>
               </a:tr>
-              <a:tr h="306705">
+              <a:tr h="242062">
                 <a:tc>
                   <a:txBody>
                     <a:bodyPr wrap="square"/>
@@ -22039,7 +22039,7 @@
                     <a:p>
                       <a:pPr algn="ctr"/>
                       <a:r>
-                        <a:rPr sz="900" b="1">
+                        <a:rPr sz="850" b="1">
                           <a:solidFill>
                             <a:srgbClr val="2B2E33"/>
                           </a:solidFill>
@@ -22062,7 +22062,7 @@
                     <a:p>
                       <a:pPr algn="l"/>
                       <a:r>
-                        <a:rPr sz="900" b="0">
+                        <a:rPr sz="850" b="0">
                           <a:solidFill>
                             <a:srgbClr val="2B2E33"/>
                           </a:solidFill>
@@ -22085,7 +22085,7 @@
                     <a:p>
                       <a:pPr algn="l"/>
                       <a:r>
-                        <a:rPr sz="900" b="0">
+                        <a:rPr sz="850" b="0">
                           <a:solidFill>
                             <a:srgbClr val="2B2E33"/>
                           </a:solidFill>
@@ -22108,7 +22108,7 @@
                     <a:p>
                       <a:pPr algn="l"/>
                       <a:r>
-                        <a:rPr sz="900" b="0">
+                        <a:rPr sz="850" b="0">
                           <a:solidFill>
                             <a:srgbClr val="2B2E33"/>
                           </a:solidFill>
@@ -22131,7 +22131,7 @@
                     <a:p>
                       <a:pPr algn="l"/>
                       <a:r>
-                        <a:rPr sz="900" b="0">
+                        <a:rPr sz="850" b="0">
                           <a:solidFill>
                             <a:srgbClr val="2B2E33"/>
                           </a:solidFill>
@@ -22154,7 +22154,7 @@
                     <a:p>
                       <a:pPr algn="l"/>
                       <a:r>
-                        <a:rPr sz="900" b="0">
+                        <a:rPr sz="850" b="0">
                           <a:solidFill>
                             <a:srgbClr val="2B2E33"/>
                           </a:solidFill>
@@ -22171,7 +22171,7 @@
                   </a:tcPr>
                 </a:tc>
               </a:tr>
-              <a:tr h="306705">
+              <a:tr h="242062">
                 <a:tc>
                   <a:txBody>
                     <a:bodyPr wrap="square"/>
@@ -22179,7 +22179,7 @@
                     <a:p>
                       <a:pPr algn="ctr"/>
                       <a:r>
-                        <a:rPr sz="900" b="1">
+                        <a:rPr sz="850" b="1">
                           <a:solidFill>
                             <a:srgbClr val="2B2E33"/>
                           </a:solidFill>
@@ -22202,7 +22202,7 @@
                     <a:p>
                       <a:pPr algn="l"/>
                       <a:r>
-                        <a:rPr sz="900" b="0">
+                        <a:rPr sz="850" b="0">
                           <a:solidFill>
                             <a:srgbClr val="2B2E33"/>
                           </a:solidFill>
@@ -22225,7 +22225,7 @@
                     <a:p>
                       <a:pPr algn="l"/>
                       <a:r>
-                        <a:rPr sz="900" b="0">
+                        <a:rPr sz="850" b="0">
                           <a:solidFill>
                             <a:srgbClr val="2B2E33"/>
                           </a:solidFill>
@@ -22248,7 +22248,7 @@
                     <a:p>
                       <a:pPr algn="l"/>
                       <a:r>
-                        <a:rPr sz="900" b="0">
+                        <a:rPr sz="850" b="0">
                           <a:solidFill>
                             <a:srgbClr val="2B2E33"/>
                           </a:solidFill>
@@ -22271,7 +22271,7 @@
                     <a:p>
                       <a:pPr algn="l"/>
                       <a:r>
-                        <a:rPr sz="900" b="0">
+                        <a:rPr sz="850" b="0">
                           <a:solidFill>
                             <a:srgbClr val="2B2E33"/>
                           </a:solidFill>
@@ -22294,7 +22294,7 @@
                     <a:p>
                       <a:pPr algn="l"/>
                       <a:r>
-                        <a:rPr sz="900" b="0">
+                        <a:rPr sz="850" b="0">
                           <a:solidFill>
                             <a:srgbClr val="2B2E33"/>
                           </a:solidFill>
@@ -22311,7 +22311,7 @@
                   </a:tcPr>
                 </a:tc>
               </a:tr>
-              <a:tr h="306705">
+              <a:tr h="242062">
                 <a:tc>
                   <a:txBody>
                     <a:bodyPr wrap="square"/>
@@ -22319,7 +22319,7 @@
                     <a:p>
                       <a:pPr algn="ctr"/>
                       <a:r>
-                        <a:rPr sz="900" b="1">
+                        <a:rPr sz="850" b="1">
                           <a:solidFill>
                             <a:srgbClr val="2B2E33"/>
                           </a:solidFill>
@@ -22342,7 +22342,7 @@
                     <a:p>
                       <a:pPr algn="l"/>
                       <a:r>
-                        <a:rPr sz="900" b="0">
+                        <a:rPr sz="850" b="0">
                           <a:solidFill>
                             <a:srgbClr val="2B2E33"/>
                           </a:solidFill>
@@ -22365,7 +22365,7 @@
                     <a:p>
                       <a:pPr algn="l"/>
                       <a:r>
-                        <a:rPr sz="900" b="0">
+                        <a:rPr sz="850" b="0">
                           <a:solidFill>
                             <a:srgbClr val="2B2E33"/>
                           </a:solidFill>
@@ -22388,7 +22388,7 @@
                     <a:p>
                       <a:pPr algn="l"/>
                       <a:r>
-                        <a:rPr sz="900" b="0">
+                        <a:rPr sz="850" b="0">
                           <a:solidFill>
                             <a:srgbClr val="2B2E33"/>
                           </a:solidFill>
@@ -22411,7 +22411,7 @@
                     <a:p>
                       <a:pPr algn="l"/>
                       <a:r>
-                        <a:rPr sz="900" b="0">
+                        <a:rPr sz="850" b="0">
                           <a:solidFill>
                             <a:srgbClr val="2B2E33"/>
                           </a:solidFill>
@@ -22434,7 +22434,7 @@
                     <a:p>
                       <a:pPr algn="l"/>
                       <a:r>
-                        <a:rPr sz="900" b="0">
+                        <a:rPr sz="850" b="0">
                           <a:solidFill>
                             <a:srgbClr val="2B2E33"/>
                           </a:solidFill>
@@ -22531,7 +22531,7 @@
                   <a:tcPr/>
                 </a:tc>
               </a:tr>
-              <a:tr h="306705">
+              <a:tr h="242062">
                 <a:tc>
                   <a:txBody>
                     <a:bodyPr wrap="square"/>
@@ -22539,7 +22539,7 @@
                     <a:p>
                       <a:pPr algn="ctr"/>
                       <a:r>
-                        <a:rPr sz="900" b="1">
+                        <a:rPr sz="850" b="1">
                           <a:solidFill>
                             <a:srgbClr val="FFFFFF"/>
                           </a:solidFill>
@@ -22562,7 +22562,7 @@
                     <a:p>
                       <a:pPr algn="l"/>
                       <a:r>
-                        <a:rPr sz="900" b="0">
+                        <a:rPr sz="850" b="0">
                           <a:solidFill>
                             <a:srgbClr val="2B2E33"/>
                           </a:solidFill>
@@ -22585,7 +22585,7 @@
                     <a:p>
                       <a:pPr algn="l"/>
                       <a:r>
-                        <a:rPr sz="900" b="0">
+                        <a:rPr sz="850" b="0">
                           <a:solidFill>
                             <a:srgbClr val="2B2E33"/>
                           </a:solidFill>
@@ -22608,7 +22608,7 @@
                     <a:p>
                       <a:pPr algn="l"/>
                       <a:r>
-                        <a:rPr sz="900" b="0">
+                        <a:rPr sz="850" b="0">
                           <a:solidFill>
                             <a:srgbClr val="2B2E33"/>
                           </a:solidFill>
@@ -22631,7 +22631,7 @@
                     <a:p>
                       <a:pPr algn="l"/>
                       <a:r>
-                        <a:rPr sz="900" b="0">
+                        <a:rPr sz="850" b="0">
                           <a:solidFill>
                             <a:srgbClr val="2B2E33"/>
                           </a:solidFill>
@@ -22654,7 +22654,7 @@
                     <a:p>
                       <a:pPr algn="l"/>
                       <a:r>
-                        <a:rPr sz="900" b="0">
+                        <a:rPr sz="850" b="0">
                           <a:solidFill>
                             <a:srgbClr val="2B2E33"/>
                           </a:solidFill>
@@ -22671,7 +22671,7 @@
                   </a:tcPr>
                 </a:tc>
               </a:tr>
-              <a:tr h="306705">
+              <a:tr h="242062">
                 <a:tc>
                   <a:txBody>
                     <a:bodyPr wrap="square"/>
@@ -22679,7 +22679,7 @@
                     <a:p>
                       <a:pPr algn="ctr"/>
                       <a:r>
-                        <a:rPr sz="900" b="1">
+                        <a:rPr sz="850" b="1">
                           <a:solidFill>
                             <a:srgbClr val="FFFFFF"/>
                           </a:solidFill>
@@ -22702,7 +22702,7 @@
                     <a:p>
                       <a:pPr algn="l"/>
                       <a:r>
-                        <a:rPr sz="900" b="0">
+                        <a:rPr sz="850" b="0">
                           <a:solidFill>
                             <a:srgbClr val="2B2E33"/>
                           </a:solidFill>
@@ -22725,7 +22725,7 @@
                     <a:p>
                       <a:pPr algn="l"/>
                       <a:r>
-                        <a:rPr sz="900" b="0">
+                        <a:rPr sz="850" b="0">
                           <a:solidFill>
                             <a:srgbClr val="2B2E33"/>
                           </a:solidFill>
@@ -22748,7 +22748,7 @@
                     <a:p>
                       <a:pPr algn="l"/>
                       <a:r>
-                        <a:rPr sz="900" b="0">
+                        <a:rPr sz="850" b="0">
                           <a:solidFill>
                             <a:srgbClr val="2B2E33"/>
                           </a:solidFill>
@@ -22771,7 +22771,7 @@
                     <a:p>
                       <a:pPr algn="l"/>
                       <a:r>
-                        <a:rPr sz="900" b="0">
+                        <a:rPr sz="850" b="0">
                           <a:solidFill>
                             <a:srgbClr val="2B2E33"/>
                           </a:solidFill>
@@ -22794,7 +22794,7 @@
                     <a:p>
                       <a:pPr algn="l"/>
                       <a:r>
-                        <a:rPr sz="900" b="0">
+                        <a:rPr sz="850" b="0">
                           <a:solidFill>
                             <a:srgbClr val="2B2E33"/>
                           </a:solidFill>
@@ -22811,7 +22811,7 @@
                   </a:tcPr>
                 </a:tc>
               </a:tr>
-              <a:tr h="306705">
+              <a:tr h="242062">
                 <a:tc>
                   <a:txBody>
                     <a:bodyPr wrap="square"/>
@@ -22819,7 +22819,7 @@
                     <a:p>
                       <a:pPr algn="ctr"/>
                       <a:r>
-                        <a:rPr sz="900" b="1">
+                        <a:rPr sz="850" b="1">
                           <a:solidFill>
                             <a:srgbClr val="2B2E33"/>
                           </a:solidFill>
@@ -22842,7 +22842,7 @@
                     <a:p>
                       <a:pPr algn="l"/>
                       <a:r>
-                        <a:rPr sz="900" b="0">
+                        <a:rPr sz="850" b="0">
                           <a:solidFill>
                             <a:srgbClr val="2B2E33"/>
                           </a:solidFill>
@@ -22865,7 +22865,7 @@
                     <a:p>
                       <a:pPr algn="l"/>
                       <a:r>
-                        <a:rPr sz="900" b="0">
+                        <a:rPr sz="850" b="0">
                           <a:solidFill>
                             <a:srgbClr val="2B2E33"/>
                           </a:solidFill>
@@ -22888,7 +22888,7 @@
                     <a:p>
                       <a:pPr algn="l"/>
                       <a:r>
-                        <a:rPr sz="900" b="0">
+                        <a:rPr sz="850" b="0">
                           <a:solidFill>
                             <a:srgbClr val="2B2E33"/>
                           </a:solidFill>
@@ -22911,7 +22911,7 @@
                     <a:p>
                       <a:pPr algn="l"/>
                       <a:r>
-                        <a:rPr sz="900" b="0">
+                        <a:rPr sz="850" b="0">
                           <a:solidFill>
                             <a:srgbClr val="2B2E33"/>
                           </a:solidFill>
@@ -22934,7 +22934,7 @@
                     <a:p>
                       <a:pPr algn="l"/>
                       <a:r>
-                        <a:rPr sz="900" b="0">
+                        <a:rPr sz="850" b="0">
                           <a:solidFill>
                             <a:srgbClr val="2B2E33"/>
                           </a:solidFill>
@@ -23031,7 +23031,7 @@
                   <a:tcPr/>
                 </a:tc>
               </a:tr>
-              <a:tr h="421005">
+              <a:tr h="401828">
                 <a:tc>
                   <a:txBody>
                     <a:bodyPr wrap="square"/>
@@ -23039,7 +23039,7 @@
                     <a:p>
                       <a:pPr algn="ctr"/>
                       <a:r>
-                        <a:rPr sz="900" b="1">
+                        <a:rPr sz="850" b="1">
                           <a:solidFill>
                             <a:srgbClr val="FFFFFF"/>
                           </a:solidFill>
@@ -23062,7 +23062,7 @@
                     <a:p>
                       <a:pPr algn="l"/>
                       <a:r>
-                        <a:rPr sz="900" b="0">
+                        <a:rPr sz="850" b="0">
                           <a:solidFill>
                             <a:srgbClr val="2B2E33"/>
                           </a:solidFill>
@@ -23085,7 +23085,7 @@
                     <a:p>
                       <a:pPr algn="l"/>
                       <a:r>
-                        <a:rPr sz="900" b="0">
+                        <a:rPr sz="850" b="0">
                           <a:solidFill>
                             <a:srgbClr val="2B2E33"/>
                           </a:solidFill>
@@ -23108,7 +23108,7 @@
                     <a:p>
                       <a:pPr algn="l"/>
                       <a:r>
-                        <a:rPr sz="900" b="0">
+                        <a:rPr sz="850" b="0">
                           <a:solidFill>
                             <a:srgbClr val="2B2E33"/>
                           </a:solidFill>
@@ -23131,7 +23131,7 @@
                     <a:p>
                       <a:pPr algn="l"/>
                       <a:r>
-                        <a:rPr sz="900" b="0">
+                        <a:rPr sz="850" b="0">
                           <a:solidFill>
                             <a:srgbClr val="2B2E33"/>
                           </a:solidFill>
@@ -23154,7 +23154,7 @@
                     <a:p>
                       <a:pPr algn="l"/>
                       <a:r>
-                        <a:rPr sz="900" b="0">
+                        <a:rPr sz="850" b="0">
                           <a:solidFill>
                             <a:srgbClr val="2B2E33"/>
                           </a:solidFill>
@@ -23171,7 +23171,7 @@
                   </a:tcPr>
                 </a:tc>
               </a:tr>
-              <a:tr h="306705">
+              <a:tr h="242062">
                 <a:tc>
                   <a:txBody>
                     <a:bodyPr wrap="square"/>
@@ -23179,7 +23179,7 @@
                     <a:p>
                       <a:pPr algn="ctr"/>
                       <a:r>
-                        <a:rPr sz="900" b="1">
+                        <a:rPr sz="850" b="1">
                           <a:solidFill>
                             <a:srgbClr val="2B2E33"/>
                           </a:solidFill>
@@ -23202,7 +23202,7 @@
                     <a:p>
                       <a:pPr algn="l"/>
                       <a:r>
-                        <a:rPr sz="900" b="0">
+                        <a:rPr sz="850" b="0">
                           <a:solidFill>
                             <a:srgbClr val="2B2E33"/>
                           </a:solidFill>
@@ -23225,7 +23225,7 @@
                     <a:p>
                       <a:pPr algn="l"/>
                       <a:r>
-                        <a:rPr sz="900" b="0">
+                        <a:rPr sz="850" b="0">
                           <a:solidFill>
                             <a:srgbClr val="2B2E33"/>
                           </a:solidFill>
@@ -23248,7 +23248,7 @@
                     <a:p>
                       <a:pPr algn="l"/>
                       <a:r>
-                        <a:rPr sz="900" b="0">
+                        <a:rPr sz="850" b="0">
                           <a:solidFill>
                             <a:srgbClr val="2B2E33"/>
                           </a:solidFill>
@@ -23271,7 +23271,7 @@
                     <a:p>
                       <a:pPr algn="l"/>
                       <a:r>
-                        <a:rPr sz="900" b="0">
+                        <a:rPr sz="850" b="0">
                           <a:solidFill>
                             <a:srgbClr val="2B2E33"/>
                           </a:solidFill>
@@ -23294,7 +23294,7 @@
                     <a:p>
                       <a:pPr algn="l"/>
                       <a:r>
-                        <a:rPr sz="900" b="0">
+                        <a:rPr sz="850" b="0">
                           <a:solidFill>
                             <a:srgbClr val="2B2E33"/>
                           </a:solidFill>
@@ -23311,7 +23311,7 @@
                   </a:tcPr>
                 </a:tc>
               </a:tr>
-              <a:tr h="306705">
+              <a:tr h="242062">
                 <a:tc>
                   <a:txBody>
                     <a:bodyPr wrap="square"/>
@@ -23319,7 +23319,7 @@
                     <a:p>
                       <a:pPr algn="ctr"/>
                       <a:r>
-                        <a:rPr sz="900" b="1">
+                        <a:rPr sz="850" b="1">
                           <a:solidFill>
                             <a:srgbClr val="2B2E33"/>
                           </a:solidFill>
@@ -23342,7 +23342,7 @@
                     <a:p>
                       <a:pPr algn="l"/>
                       <a:r>
-                        <a:rPr sz="900" b="0">
+                        <a:rPr sz="850" b="0">
                           <a:solidFill>
                             <a:srgbClr val="2B2E33"/>
                           </a:solidFill>
@@ -23365,7 +23365,7 @@
                     <a:p>
                       <a:pPr algn="l"/>
                       <a:r>
-                        <a:rPr sz="900" b="0">
+                        <a:rPr sz="850" b="0">
                           <a:solidFill>
                             <a:srgbClr val="2B2E33"/>
                           </a:solidFill>
@@ -23388,7 +23388,7 @@
                     <a:p>
                       <a:pPr algn="l"/>
                       <a:r>
-                        <a:rPr sz="900" b="0">
+                        <a:rPr sz="850" b="0">
                           <a:solidFill>
                             <a:srgbClr val="2B2E33"/>
                           </a:solidFill>
@@ -23411,7 +23411,7 @@
                     <a:p>
                       <a:pPr algn="l"/>
                       <a:r>
-                        <a:rPr sz="900" b="0">
+                        <a:rPr sz="850" b="0">
                           <a:solidFill>
                             <a:srgbClr val="2B2E33"/>
                           </a:solidFill>
@@ -23434,7 +23434,7 @@
                     <a:p>
                       <a:pPr algn="l"/>
                       <a:r>
-                        <a:rPr sz="900" b="0">
+                        <a:rPr sz="850" b="0">
                           <a:solidFill>
                             <a:srgbClr val="2B2E33"/>
                           </a:solidFill>

--- a/examples/deck.pptx
+++ b/examples/deck.pptx
@@ -5124,7 +5124,7 @@
           </a:bodyPr>
           <a:lstStyle/>
           <a:p>
-            <a:pPr algn="l" marL="118872" indent="-118872">
+            <a:pPr algn="l" marL="109728" indent="-109728">
               <a:lnSpc>
                 <a:spcPct val="92000"/>
               </a:lnSpc>
@@ -5147,7 +5147,7 @@
             </a:r>
           </a:p>
           <a:p>
-            <a:pPr algn="l" marL="118872" indent="-118872">
+            <a:pPr algn="l" marL="109728" indent="-109728">
               <a:lnSpc>
                 <a:spcPct val="92000"/>
               </a:lnSpc>
@@ -5170,7 +5170,7 @@
             </a:r>
           </a:p>
           <a:p>
-            <a:pPr algn="l" marL="118872" indent="-118872">
+            <a:pPr algn="l" marL="109728" indent="-109728">
               <a:lnSpc>
                 <a:spcPct val="92000"/>
               </a:lnSpc>
@@ -5193,7 +5193,7 @@
             </a:r>
           </a:p>
           <a:p>
-            <a:pPr algn="l" marL="118872" indent="-118872">
+            <a:pPr algn="l" marL="109728" indent="-109728">
               <a:lnSpc>
                 <a:spcPct val="92000"/>
               </a:lnSpc>
@@ -6261,7 +6261,7 @@
           </a:bodyPr>
           <a:lstStyle/>
           <a:p>
-            <a:pPr algn="l" marL="118872" indent="-118872">
+            <a:pPr algn="l" marL="109728" indent="-109728">
               <a:lnSpc>
                 <a:spcPct val="92000"/>
               </a:lnSpc>
@@ -6284,7 +6284,7 @@
             </a:r>
           </a:p>
           <a:p>
-            <a:pPr algn="l" marL="118872" indent="-118872">
+            <a:pPr algn="l" marL="109728" indent="-109728">
               <a:lnSpc>
                 <a:spcPct val="92000"/>
               </a:lnSpc>
@@ -6307,7 +6307,7 @@
             </a:r>
           </a:p>
           <a:p>
-            <a:pPr algn="l" marL="118872" indent="-118872">
+            <a:pPr algn="l" marL="109728" indent="-109728">
               <a:lnSpc>
                 <a:spcPct val="92000"/>
               </a:lnSpc>
@@ -6330,7 +6330,7 @@
             </a:r>
           </a:p>
           <a:p>
-            <a:pPr algn="l" marL="118872" indent="-118872">
+            <a:pPr algn="l" marL="109728" indent="-109728">
               <a:lnSpc>
                 <a:spcPct val="92000"/>
               </a:lnSpc>
@@ -6405,7 +6405,7 @@
           </a:bodyPr>
           <a:lstStyle/>
           <a:p>
-            <a:pPr algn="l" marL="118872" indent="-118872">
+            <a:pPr algn="l" marL="109728" indent="-109728">
               <a:lnSpc>
                 <a:spcPct val="92000"/>
               </a:lnSpc>
@@ -6428,7 +6428,7 @@
             </a:r>
           </a:p>
           <a:p>
-            <a:pPr algn="l" marL="118872" indent="-118872">
+            <a:pPr algn="l" marL="109728" indent="-109728">
               <a:lnSpc>
                 <a:spcPct val="92000"/>
               </a:lnSpc>
@@ -6451,7 +6451,7 @@
             </a:r>
           </a:p>
           <a:p>
-            <a:pPr algn="l" marL="118872" indent="-118872">
+            <a:pPr algn="l" marL="109728" indent="-109728">
               <a:lnSpc>
                 <a:spcPct val="92000"/>
               </a:lnSpc>
@@ -6526,7 +6526,7 @@
           </a:bodyPr>
           <a:lstStyle/>
           <a:p>
-            <a:pPr algn="l" marL="118872" indent="-118872">
+            <a:pPr algn="l" marL="109728" indent="-109728">
               <a:lnSpc>
                 <a:spcPct val="92000"/>
               </a:lnSpc>
@@ -6549,7 +6549,7 @@
             </a:r>
           </a:p>
           <a:p>
-            <a:pPr algn="l" marL="118872" indent="-118872">
+            <a:pPr algn="l" marL="109728" indent="-109728">
               <a:lnSpc>
                 <a:spcPct val="92000"/>
               </a:lnSpc>
@@ -6572,7 +6572,7 @@
             </a:r>
           </a:p>
           <a:p>
-            <a:pPr algn="l" marL="118872" indent="-118872">
+            <a:pPr algn="l" marL="109728" indent="-109728">
               <a:lnSpc>
                 <a:spcPct val="92000"/>
               </a:lnSpc>
@@ -6595,7 +6595,7 @@
             </a:r>
           </a:p>
           <a:p>
-            <a:pPr algn="l" marL="118872" indent="-118872">
+            <a:pPr algn="l" marL="109728" indent="-109728">
               <a:lnSpc>
                 <a:spcPct val="92000"/>
               </a:lnSpc>
@@ -6670,7 +6670,7 @@
           </a:bodyPr>
           <a:lstStyle/>
           <a:p>
-            <a:pPr algn="l" marL="118872" indent="-118872">
+            <a:pPr algn="l" marL="109728" indent="-109728">
               <a:lnSpc>
                 <a:spcPct val="92000"/>
               </a:lnSpc>
@@ -6693,7 +6693,7 @@
             </a:r>
           </a:p>
           <a:p>
-            <a:pPr algn="l" marL="118872" indent="-118872">
+            <a:pPr algn="l" marL="109728" indent="-109728">
               <a:lnSpc>
                 <a:spcPct val="92000"/>
               </a:lnSpc>
@@ -6716,7 +6716,7 @@
             </a:r>
           </a:p>
           <a:p>
-            <a:pPr algn="l" marL="118872" indent="-118872">
+            <a:pPr algn="l" marL="109728" indent="-109728">
               <a:lnSpc>
                 <a:spcPct val="92000"/>
               </a:lnSpc>
@@ -6791,7 +6791,7 @@
           </a:bodyPr>
           <a:lstStyle/>
           <a:p>
-            <a:pPr algn="l" marL="118872" indent="-118872">
+            <a:pPr algn="l" marL="109728" indent="-109728">
               <a:lnSpc>
                 <a:spcPct val="92000"/>
               </a:lnSpc>
@@ -6814,7 +6814,7 @@
             </a:r>
           </a:p>
           <a:p>
-            <a:pPr algn="l" marL="118872" indent="-118872">
+            <a:pPr algn="l" marL="109728" indent="-109728">
               <a:lnSpc>
                 <a:spcPct val="92000"/>
               </a:lnSpc>
@@ -6837,7 +6837,7 @@
             </a:r>
           </a:p>
           <a:p>
-            <a:pPr algn="l" marL="118872" indent="-118872">
+            <a:pPr algn="l" marL="109728" indent="-109728">
               <a:lnSpc>
                 <a:spcPct val="92000"/>
               </a:lnSpc>
@@ -6860,7 +6860,7 @@
             </a:r>
           </a:p>
           <a:p>
-            <a:pPr algn="l" marL="118872" indent="-118872">
+            <a:pPr algn="l" marL="109728" indent="-109728">
               <a:lnSpc>
                 <a:spcPct val="92000"/>
               </a:lnSpc>
@@ -6935,7 +6935,7 @@
           </a:bodyPr>
           <a:lstStyle/>
           <a:p>
-            <a:pPr algn="l" marL="118872" indent="-118872">
+            <a:pPr algn="l" marL="109728" indent="-109728">
               <a:lnSpc>
                 <a:spcPct val="92000"/>
               </a:lnSpc>
@@ -6958,7 +6958,7 @@
             </a:r>
           </a:p>
           <a:p>
-            <a:pPr algn="l" marL="118872" indent="-118872">
+            <a:pPr algn="l" marL="109728" indent="-109728">
               <a:lnSpc>
                 <a:spcPct val="92000"/>
               </a:lnSpc>
@@ -6981,7 +6981,7 @@
             </a:r>
           </a:p>
           <a:p>
-            <a:pPr algn="l" marL="118872" indent="-118872">
+            <a:pPr algn="l" marL="109728" indent="-109728">
               <a:lnSpc>
                 <a:spcPct val="92000"/>
               </a:lnSpc>
@@ -7093,7 +7093,7 @@
           </a:bodyPr>
           <a:lstStyle/>
           <a:p>
-            <a:pPr algn="l" marL="118872" indent="-118872">
+            <a:pPr algn="l" marL="109728" indent="-109728">
               <a:lnSpc>
                 <a:spcPct val="92000"/>
               </a:lnSpc>
@@ -7116,7 +7116,7 @@
             </a:r>
           </a:p>
           <a:p>
-            <a:pPr algn="l" marL="118872" indent="-118872">
+            <a:pPr algn="l" marL="109728" indent="-109728">
               <a:lnSpc>
                 <a:spcPct val="92000"/>
               </a:lnSpc>
@@ -7139,7 +7139,7 @@
             </a:r>
           </a:p>
           <a:p>
-            <a:pPr algn="l" marL="118872" indent="-118872">
+            <a:pPr algn="l" marL="109728" indent="-109728">
               <a:lnSpc>
                 <a:spcPct val="92000"/>
               </a:lnSpc>
@@ -7162,7 +7162,7 @@
             </a:r>
           </a:p>
           <a:p>
-            <a:pPr algn="l" marL="118872" indent="-118872">
+            <a:pPr algn="l" marL="109728" indent="-109728">
               <a:lnSpc>
                 <a:spcPct val="92000"/>
               </a:lnSpc>
@@ -8147,7 +8147,7 @@
           </a:bodyPr>
           <a:lstStyle/>
           <a:p>
-            <a:pPr algn="l" marL="118872" indent="-118872">
+            <a:pPr algn="l" marL="109728" indent="-109728">
               <a:lnSpc>
                 <a:spcPct val="92000"/>
               </a:lnSpc>
@@ -8170,7 +8170,7 @@
             </a:r>
           </a:p>
           <a:p>
-            <a:pPr algn="l" marL="118872" indent="-118872">
+            <a:pPr algn="l" marL="109728" indent="-109728">
               <a:lnSpc>
                 <a:spcPct val="92000"/>
               </a:lnSpc>
@@ -8193,7 +8193,7 @@
             </a:r>
           </a:p>
           <a:p>
-            <a:pPr algn="l" marL="118872" indent="-118872">
+            <a:pPr algn="l" marL="109728" indent="-109728">
               <a:lnSpc>
                 <a:spcPct val="92000"/>
               </a:lnSpc>
@@ -8216,7 +8216,7 @@
             </a:r>
           </a:p>
           <a:p>
-            <a:pPr algn="l" marL="118872" indent="-118872">
+            <a:pPr algn="l" marL="109728" indent="-109728">
               <a:lnSpc>
                 <a:spcPct val="92000"/>
               </a:lnSpc>
@@ -8291,7 +8291,7 @@
           </a:bodyPr>
           <a:lstStyle/>
           <a:p>
-            <a:pPr algn="l" marL="118872" indent="-118872">
+            <a:pPr algn="l" marL="109728" indent="-109728">
               <a:lnSpc>
                 <a:spcPct val="92000"/>
               </a:lnSpc>
@@ -8314,7 +8314,7 @@
             </a:r>
           </a:p>
           <a:p>
-            <a:pPr algn="l" marL="118872" indent="-118872">
+            <a:pPr algn="l" marL="109728" indent="-109728">
               <a:lnSpc>
                 <a:spcPct val="92000"/>
               </a:lnSpc>
@@ -8337,7 +8337,7 @@
             </a:r>
           </a:p>
           <a:p>
-            <a:pPr algn="l" marL="118872" indent="-118872">
+            <a:pPr algn="l" marL="109728" indent="-109728">
               <a:lnSpc>
                 <a:spcPct val="92000"/>
               </a:lnSpc>
@@ -8412,7 +8412,7 @@
           </a:bodyPr>
           <a:lstStyle/>
           <a:p>
-            <a:pPr algn="l" marL="118872" indent="-118872">
+            <a:pPr algn="l" marL="109728" indent="-109728">
               <a:lnSpc>
                 <a:spcPct val="92000"/>
               </a:lnSpc>
@@ -8435,7 +8435,7 @@
             </a:r>
           </a:p>
           <a:p>
-            <a:pPr algn="l" marL="118872" indent="-118872">
+            <a:pPr algn="l" marL="109728" indent="-109728">
               <a:lnSpc>
                 <a:spcPct val="92000"/>
               </a:lnSpc>
@@ -8458,7 +8458,7 @@
             </a:r>
           </a:p>
           <a:p>
-            <a:pPr algn="l" marL="118872" indent="-118872">
+            <a:pPr algn="l" marL="109728" indent="-109728">
               <a:lnSpc>
                 <a:spcPct val="92000"/>
               </a:lnSpc>
@@ -8481,7 +8481,7 @@
             </a:r>
           </a:p>
           <a:p>
-            <a:pPr algn="l" marL="118872" indent="-118872">
+            <a:pPr algn="l" marL="109728" indent="-109728">
               <a:lnSpc>
                 <a:spcPct val="92000"/>
               </a:lnSpc>
@@ -8556,7 +8556,7 @@
           </a:bodyPr>
           <a:lstStyle/>
           <a:p>
-            <a:pPr algn="l" marL="118872" indent="-118872">
+            <a:pPr algn="l" marL="109728" indent="-109728">
               <a:lnSpc>
                 <a:spcPct val="92000"/>
               </a:lnSpc>
@@ -8579,7 +8579,7 @@
             </a:r>
           </a:p>
           <a:p>
-            <a:pPr algn="l" marL="118872" indent="-118872">
+            <a:pPr algn="l" marL="109728" indent="-109728">
               <a:lnSpc>
                 <a:spcPct val="92000"/>
               </a:lnSpc>
@@ -8602,7 +8602,7 @@
             </a:r>
           </a:p>
           <a:p>
-            <a:pPr algn="l" marL="118872" indent="-118872">
+            <a:pPr algn="l" marL="109728" indent="-109728">
               <a:lnSpc>
                 <a:spcPct val="92000"/>
               </a:lnSpc>
@@ -8677,7 +8677,7 @@
           </a:bodyPr>
           <a:lstStyle/>
           <a:p>
-            <a:pPr algn="l" marL="118872" indent="-118872">
+            <a:pPr algn="l" marL="109728" indent="-109728">
               <a:lnSpc>
                 <a:spcPct val="92000"/>
               </a:lnSpc>
@@ -8700,7 +8700,7 @@
             </a:r>
           </a:p>
           <a:p>
-            <a:pPr algn="l" marL="118872" indent="-118872">
+            <a:pPr algn="l" marL="109728" indent="-109728">
               <a:lnSpc>
                 <a:spcPct val="92000"/>
               </a:lnSpc>
@@ -8723,7 +8723,7 @@
             </a:r>
           </a:p>
           <a:p>
-            <a:pPr algn="l" marL="118872" indent="-118872">
+            <a:pPr algn="l" marL="109728" indent="-109728">
               <a:lnSpc>
                 <a:spcPct val="92000"/>
               </a:lnSpc>
@@ -8746,7 +8746,7 @@
             </a:r>
           </a:p>
           <a:p>
-            <a:pPr algn="l" marL="118872" indent="-118872">
+            <a:pPr algn="l" marL="109728" indent="-109728">
               <a:lnSpc>
                 <a:spcPct val="92000"/>
               </a:lnSpc>
@@ -8821,7 +8821,7 @@
           </a:bodyPr>
           <a:lstStyle/>
           <a:p>
-            <a:pPr algn="l" marL="118872" indent="-118872">
+            <a:pPr algn="l" marL="109728" indent="-109728">
               <a:lnSpc>
                 <a:spcPct val="92000"/>
               </a:lnSpc>
@@ -8844,7 +8844,7 @@
             </a:r>
           </a:p>
           <a:p>
-            <a:pPr algn="l" marL="118872" indent="-118872">
+            <a:pPr algn="l" marL="109728" indent="-109728">
               <a:lnSpc>
                 <a:spcPct val="92000"/>
               </a:lnSpc>
@@ -8867,7 +8867,7 @@
             </a:r>
           </a:p>
           <a:p>
-            <a:pPr algn="l" marL="118872" indent="-118872">
+            <a:pPr algn="l" marL="109728" indent="-109728">
               <a:lnSpc>
                 <a:spcPct val="92000"/>
               </a:lnSpc>
@@ -8942,7 +8942,7 @@
           </a:bodyPr>
           <a:lstStyle/>
           <a:p>
-            <a:pPr algn="l" marL="118872" indent="-118872">
+            <a:pPr algn="l" marL="109728" indent="-109728">
               <a:lnSpc>
                 <a:spcPct val="92000"/>
               </a:lnSpc>
@@ -8965,7 +8965,7 @@
             </a:r>
           </a:p>
           <a:p>
-            <a:pPr algn="l" marL="118872" indent="-118872">
+            <a:pPr algn="l" marL="109728" indent="-109728">
               <a:lnSpc>
                 <a:spcPct val="92000"/>
               </a:lnSpc>
@@ -8988,7 +8988,7 @@
             </a:r>
           </a:p>
           <a:p>
-            <a:pPr algn="l" marL="118872" indent="-118872">
+            <a:pPr algn="l" marL="109728" indent="-109728">
               <a:lnSpc>
                 <a:spcPct val="92000"/>
               </a:lnSpc>
@@ -9011,7 +9011,7 @@
             </a:r>
           </a:p>
           <a:p>
-            <a:pPr algn="l" marL="118872" indent="-118872">
+            <a:pPr algn="l" marL="109728" indent="-109728">
               <a:lnSpc>
                 <a:spcPct val="92000"/>
               </a:lnSpc>
@@ -9086,7 +9086,7 @@
           </a:bodyPr>
           <a:lstStyle/>
           <a:p>
-            <a:pPr algn="l" marL="118872" indent="-118872">
+            <a:pPr algn="l" marL="109728" indent="-109728">
               <a:lnSpc>
                 <a:spcPct val="92000"/>
               </a:lnSpc>
@@ -9109,7 +9109,7 @@
             </a:r>
           </a:p>
           <a:p>
-            <a:pPr algn="l" marL="118872" indent="-118872">
+            <a:pPr algn="l" marL="109728" indent="-109728">
               <a:lnSpc>
                 <a:spcPct val="92000"/>
               </a:lnSpc>
@@ -9132,7 +9132,7 @@
             </a:r>
           </a:p>
           <a:p>
-            <a:pPr algn="l" marL="118872" indent="-118872">
+            <a:pPr algn="l" marL="109728" indent="-109728">
               <a:lnSpc>
                 <a:spcPct val="92000"/>
               </a:lnSpc>
@@ -9244,7 +9244,7 @@
           </a:bodyPr>
           <a:lstStyle/>
           <a:p>
-            <a:pPr algn="l" marL="118872" indent="-118872">
+            <a:pPr algn="l" marL="109728" indent="-109728">
               <a:lnSpc>
                 <a:spcPct val="92000"/>
               </a:lnSpc>
@@ -9267,7 +9267,7 @@
             </a:r>
           </a:p>
           <a:p>
-            <a:pPr algn="l" marL="118872" indent="-118872">
+            <a:pPr algn="l" marL="109728" indent="-109728">
               <a:lnSpc>
                 <a:spcPct val="92000"/>
               </a:lnSpc>
@@ -9290,7 +9290,7 @@
             </a:r>
           </a:p>
           <a:p>
-            <a:pPr algn="l" marL="118872" indent="-118872">
+            <a:pPr algn="l" marL="109728" indent="-109728">
               <a:lnSpc>
                 <a:spcPct val="92000"/>
               </a:lnSpc>
@@ -9313,7 +9313,7 @@
             </a:r>
           </a:p>
           <a:p>
-            <a:pPr algn="l" marL="118872" indent="-118872">
+            <a:pPr algn="l" marL="109728" indent="-109728">
               <a:lnSpc>
                 <a:spcPct val="92000"/>
               </a:lnSpc>
@@ -10186,7 +10186,7 @@
           </a:bodyPr>
           <a:lstStyle/>
           <a:p>
-            <a:pPr algn="l" marL="118872" indent="-118872">
+            <a:pPr algn="l" marL="109728" indent="-109728">
               <a:lnSpc>
                 <a:spcPct val="92000"/>
               </a:lnSpc>
@@ -10209,7 +10209,7 @@
             </a:r>
           </a:p>
           <a:p>
-            <a:pPr algn="l" marL="118872" indent="-118872">
+            <a:pPr algn="l" marL="109728" indent="-109728">
               <a:lnSpc>
                 <a:spcPct val="92000"/>
               </a:lnSpc>
@@ -10232,7 +10232,7 @@
             </a:r>
           </a:p>
           <a:p>
-            <a:pPr algn="l" marL="118872" indent="-118872">
+            <a:pPr algn="l" marL="109728" indent="-109728">
               <a:lnSpc>
                 <a:spcPct val="92000"/>
               </a:lnSpc>
@@ -10255,7 +10255,7 @@
             </a:r>
           </a:p>
           <a:p>
-            <a:pPr algn="l" marL="118872" indent="-118872">
+            <a:pPr algn="l" marL="109728" indent="-109728">
               <a:lnSpc>
                 <a:spcPct val="92000"/>
               </a:lnSpc>
@@ -10330,7 +10330,7 @@
           </a:bodyPr>
           <a:lstStyle/>
           <a:p>
-            <a:pPr algn="l" marL="118872" indent="-118872">
+            <a:pPr algn="l" marL="109728" indent="-109728">
               <a:lnSpc>
                 <a:spcPct val="92000"/>
               </a:lnSpc>
@@ -10353,7 +10353,7 @@
             </a:r>
           </a:p>
           <a:p>
-            <a:pPr algn="l" marL="118872" indent="-118872">
+            <a:pPr algn="l" marL="109728" indent="-109728">
               <a:lnSpc>
                 <a:spcPct val="92000"/>
               </a:lnSpc>
@@ -10376,7 +10376,7 @@
             </a:r>
           </a:p>
           <a:p>
-            <a:pPr algn="l" marL="118872" indent="-118872">
+            <a:pPr algn="l" marL="109728" indent="-109728">
               <a:lnSpc>
                 <a:spcPct val="92000"/>
               </a:lnSpc>
@@ -10451,7 +10451,7 @@
           </a:bodyPr>
           <a:lstStyle/>
           <a:p>
-            <a:pPr algn="l" marL="118872" indent="-118872">
+            <a:pPr algn="l" marL="109728" indent="-109728">
               <a:lnSpc>
                 <a:spcPct val="92000"/>
               </a:lnSpc>
@@ -10474,7 +10474,7 @@
             </a:r>
           </a:p>
           <a:p>
-            <a:pPr algn="l" marL="118872" indent="-118872">
+            <a:pPr algn="l" marL="109728" indent="-109728">
               <a:lnSpc>
                 <a:spcPct val="92000"/>
               </a:lnSpc>
@@ -10497,7 +10497,7 @@
             </a:r>
           </a:p>
           <a:p>
-            <a:pPr algn="l" marL="118872" indent="-118872">
+            <a:pPr algn="l" marL="109728" indent="-109728">
               <a:lnSpc>
                 <a:spcPct val="92000"/>
               </a:lnSpc>
@@ -10520,7 +10520,7 @@
             </a:r>
           </a:p>
           <a:p>
-            <a:pPr algn="l" marL="118872" indent="-118872">
+            <a:pPr algn="l" marL="109728" indent="-109728">
               <a:lnSpc>
                 <a:spcPct val="92000"/>
               </a:lnSpc>
@@ -10595,7 +10595,7 @@
           </a:bodyPr>
           <a:lstStyle/>
           <a:p>
-            <a:pPr algn="l" marL="118872" indent="-118872">
+            <a:pPr algn="l" marL="109728" indent="-109728">
               <a:lnSpc>
                 <a:spcPct val="92000"/>
               </a:lnSpc>
@@ -10618,7 +10618,7 @@
             </a:r>
           </a:p>
           <a:p>
-            <a:pPr algn="l" marL="118872" indent="-118872">
+            <a:pPr algn="l" marL="109728" indent="-109728">
               <a:lnSpc>
                 <a:spcPct val="92000"/>
               </a:lnSpc>
@@ -10641,7 +10641,7 @@
             </a:r>
           </a:p>
           <a:p>
-            <a:pPr algn="l" marL="118872" indent="-118872">
+            <a:pPr algn="l" marL="109728" indent="-109728">
               <a:lnSpc>
                 <a:spcPct val="92000"/>
               </a:lnSpc>
@@ -10716,7 +10716,7 @@
           </a:bodyPr>
           <a:lstStyle/>
           <a:p>
-            <a:pPr algn="l" marL="118872" indent="-118872">
+            <a:pPr algn="l" marL="109728" indent="-109728">
               <a:lnSpc>
                 <a:spcPct val="92000"/>
               </a:lnSpc>
@@ -10739,7 +10739,7 @@
             </a:r>
           </a:p>
           <a:p>
-            <a:pPr algn="l" marL="118872" indent="-118872">
+            <a:pPr algn="l" marL="109728" indent="-109728">
               <a:lnSpc>
                 <a:spcPct val="92000"/>
               </a:lnSpc>
@@ -10762,7 +10762,7 @@
             </a:r>
           </a:p>
           <a:p>
-            <a:pPr algn="l" marL="118872" indent="-118872">
+            <a:pPr algn="l" marL="109728" indent="-109728">
               <a:lnSpc>
                 <a:spcPct val="92000"/>
               </a:lnSpc>
@@ -10785,7 +10785,7 @@
             </a:r>
           </a:p>
           <a:p>
-            <a:pPr algn="l" marL="118872" indent="-118872">
+            <a:pPr algn="l" marL="109728" indent="-109728">
               <a:lnSpc>
                 <a:spcPct val="92000"/>
               </a:lnSpc>
@@ -10860,7 +10860,7 @@
           </a:bodyPr>
           <a:lstStyle/>
           <a:p>
-            <a:pPr algn="l" marL="118872" indent="-118872">
+            <a:pPr algn="l" marL="109728" indent="-109728">
               <a:lnSpc>
                 <a:spcPct val="92000"/>
               </a:lnSpc>
@@ -10883,7 +10883,7 @@
             </a:r>
           </a:p>
           <a:p>
-            <a:pPr algn="l" marL="118872" indent="-118872">
+            <a:pPr algn="l" marL="109728" indent="-109728">
               <a:lnSpc>
                 <a:spcPct val="92000"/>
               </a:lnSpc>
@@ -10906,7 +10906,7 @@
             </a:r>
           </a:p>
           <a:p>
-            <a:pPr algn="l" marL="118872" indent="-118872">
+            <a:pPr algn="l" marL="109728" indent="-109728">
               <a:lnSpc>
                 <a:spcPct val="92000"/>
               </a:lnSpc>
@@ -11018,7 +11018,7 @@
           </a:bodyPr>
           <a:lstStyle/>
           <a:p>
-            <a:pPr algn="l" marL="118872" indent="-118872">
+            <a:pPr algn="l" marL="109728" indent="-109728">
               <a:lnSpc>
                 <a:spcPct val="92000"/>
               </a:lnSpc>
@@ -11041,7 +11041,7 @@
             </a:r>
           </a:p>
           <a:p>
-            <a:pPr algn="l" marL="118872" indent="-118872">
+            <a:pPr algn="l" marL="109728" indent="-109728">
               <a:lnSpc>
                 <a:spcPct val="92000"/>
               </a:lnSpc>
@@ -11064,7 +11064,7 @@
             </a:r>
           </a:p>
           <a:p>
-            <a:pPr algn="l" marL="118872" indent="-118872">
+            <a:pPr algn="l" marL="109728" indent="-109728">
               <a:lnSpc>
                 <a:spcPct val="92000"/>
               </a:lnSpc>
@@ -11087,7 +11087,7 @@
             </a:r>
           </a:p>
           <a:p>
-            <a:pPr algn="l" marL="118872" indent="-118872">
+            <a:pPr algn="l" marL="109728" indent="-109728">
               <a:lnSpc>
                 <a:spcPct val="92000"/>
               </a:lnSpc>
@@ -12251,7 +12251,7 @@
           </a:bodyPr>
           <a:lstStyle/>
           <a:p>
-            <a:pPr algn="l" marL="91440" indent="-91440">
+            <a:pPr algn="l" marL="109728" indent="-109728">
               <a:lnSpc>
                 <a:spcPct val="100000"/>
               </a:lnSpc>
@@ -12274,7 +12274,7 @@
             </a:r>
           </a:p>
           <a:p>
-            <a:pPr algn="l" marL="91440" indent="-91440">
+            <a:pPr algn="l" marL="109728" indent="-109728">
               <a:lnSpc>
                 <a:spcPct val="100000"/>
               </a:lnSpc>
@@ -12297,7 +12297,7 @@
             </a:r>
           </a:p>
           <a:p>
-            <a:pPr algn="l" marL="91440" indent="-91440">
+            <a:pPr algn="l" marL="109728" indent="-109728">
               <a:lnSpc>
                 <a:spcPct val="100000"/>
               </a:lnSpc>
@@ -12379,7 +12379,7 @@
           </a:bodyPr>
           <a:lstStyle/>
           <a:p>
-            <a:pPr algn="l" marL="91440" indent="-91440">
+            <a:pPr algn="l" marL="109728" indent="-109728">
               <a:lnSpc>
                 <a:spcPct val="100000"/>
               </a:lnSpc>
@@ -12402,7 +12402,7 @@
             </a:r>
           </a:p>
           <a:p>
-            <a:pPr algn="l" marL="91440" indent="-91440">
+            <a:pPr algn="l" marL="109728" indent="-109728">
               <a:lnSpc>
                 <a:spcPct val="100000"/>
               </a:lnSpc>
@@ -12425,7 +12425,7 @@
             </a:r>
           </a:p>
           <a:p>
-            <a:pPr algn="l" marL="91440" indent="-91440">
+            <a:pPr algn="l" marL="109728" indent="-109728">
               <a:lnSpc>
                 <a:spcPct val="100000"/>
               </a:lnSpc>
@@ -12448,7 +12448,7 @@
             </a:r>
           </a:p>
           <a:p>
-            <a:pPr algn="l" marL="91440" indent="-91440">
+            <a:pPr algn="l" marL="109728" indent="-109728">
               <a:lnSpc>
                 <a:spcPct val="100000"/>
               </a:lnSpc>
@@ -12674,7 +12674,7 @@
           </a:bodyPr>
           <a:lstStyle/>
           <a:p>
-            <a:pPr algn="l" marL="91440" indent="-91440">
+            <a:pPr algn="l" marL="109728" indent="-109728">
               <a:lnSpc>
                 <a:spcPct val="100000"/>
               </a:lnSpc>
@@ -12697,7 +12697,7 @@
             </a:r>
           </a:p>
           <a:p>
-            <a:pPr algn="l" marL="91440" indent="-91440">
+            <a:pPr algn="l" marL="109728" indent="-109728">
               <a:lnSpc>
                 <a:spcPct val="100000"/>
               </a:lnSpc>
@@ -12720,7 +12720,7 @@
             </a:r>
           </a:p>
           <a:p>
-            <a:pPr algn="l" marL="91440" indent="-91440">
+            <a:pPr algn="l" marL="109728" indent="-109728">
               <a:lnSpc>
                 <a:spcPct val="100000"/>
               </a:lnSpc>
@@ -12802,7 +12802,7 @@
           </a:bodyPr>
           <a:lstStyle/>
           <a:p>
-            <a:pPr algn="l" marL="91440" indent="-91440">
+            <a:pPr algn="l" marL="109728" indent="-109728">
               <a:lnSpc>
                 <a:spcPct val="100000"/>
               </a:lnSpc>
@@ -12825,7 +12825,7 @@
             </a:r>
           </a:p>
           <a:p>
-            <a:pPr algn="l" marL="91440" indent="-91440">
+            <a:pPr algn="l" marL="109728" indent="-109728">
               <a:lnSpc>
                 <a:spcPct val="100000"/>
               </a:lnSpc>
@@ -12848,7 +12848,7 @@
             </a:r>
           </a:p>
           <a:p>
-            <a:pPr algn="l" marL="91440" indent="-91440">
+            <a:pPr algn="l" marL="109728" indent="-109728">
               <a:lnSpc>
                 <a:spcPct val="100000"/>
               </a:lnSpc>
@@ -12871,7 +12871,7 @@
             </a:r>
           </a:p>
           <a:p>
-            <a:pPr algn="l" marL="91440" indent="-91440">
+            <a:pPr algn="l" marL="109728" indent="-109728">
               <a:lnSpc>
                 <a:spcPct val="100000"/>
               </a:lnSpc>
@@ -13097,7 +13097,7 @@
           </a:bodyPr>
           <a:lstStyle/>
           <a:p>
-            <a:pPr algn="l" marL="91440" indent="-91440">
+            <a:pPr algn="l" marL="109728" indent="-109728">
               <a:lnSpc>
                 <a:spcPct val="100000"/>
               </a:lnSpc>
@@ -13120,7 +13120,7 @@
             </a:r>
           </a:p>
           <a:p>
-            <a:pPr algn="l" marL="91440" indent="-91440">
+            <a:pPr algn="l" marL="109728" indent="-109728">
               <a:lnSpc>
                 <a:spcPct val="100000"/>
               </a:lnSpc>
@@ -13143,7 +13143,7 @@
             </a:r>
           </a:p>
           <a:p>
-            <a:pPr algn="l" marL="91440" indent="-91440">
+            <a:pPr algn="l" marL="109728" indent="-109728">
               <a:lnSpc>
                 <a:spcPct val="100000"/>
               </a:lnSpc>
@@ -13225,7 +13225,7 @@
           </a:bodyPr>
           <a:lstStyle/>
           <a:p>
-            <a:pPr algn="l" marL="91440" indent="-91440">
+            <a:pPr algn="l" marL="109728" indent="-109728">
               <a:lnSpc>
                 <a:spcPct val="100000"/>
               </a:lnSpc>
@@ -13248,7 +13248,7 @@
             </a:r>
           </a:p>
           <a:p>
-            <a:pPr algn="l" marL="91440" indent="-91440">
+            <a:pPr algn="l" marL="109728" indent="-109728">
               <a:lnSpc>
                 <a:spcPct val="100000"/>
               </a:lnSpc>
@@ -13271,7 +13271,7 @@
             </a:r>
           </a:p>
           <a:p>
-            <a:pPr algn="l" marL="91440" indent="-91440">
+            <a:pPr algn="l" marL="109728" indent="-109728">
               <a:lnSpc>
                 <a:spcPct val="100000"/>
               </a:lnSpc>
@@ -13294,7 +13294,7 @@
             </a:r>
           </a:p>
           <a:p>
-            <a:pPr algn="l" marL="91440" indent="-91440">
+            <a:pPr algn="l" marL="109728" indent="-109728">
               <a:lnSpc>
                 <a:spcPct val="100000"/>
               </a:lnSpc>
@@ -13520,7 +13520,7 @@
           </a:bodyPr>
           <a:lstStyle/>
           <a:p>
-            <a:pPr algn="l" marL="91440" indent="-91440">
+            <a:pPr algn="l" marL="109728" indent="-109728">
               <a:lnSpc>
                 <a:spcPct val="100000"/>
               </a:lnSpc>
@@ -13543,7 +13543,7 @@
             </a:r>
           </a:p>
           <a:p>
-            <a:pPr algn="l" marL="91440" indent="-91440">
+            <a:pPr algn="l" marL="109728" indent="-109728">
               <a:lnSpc>
                 <a:spcPct val="100000"/>
               </a:lnSpc>
@@ -13566,7 +13566,7 @@
             </a:r>
           </a:p>
           <a:p>
-            <a:pPr algn="l" marL="91440" indent="-91440">
+            <a:pPr algn="l" marL="109728" indent="-109728">
               <a:lnSpc>
                 <a:spcPct val="100000"/>
               </a:lnSpc>
@@ -13648,7 +13648,7 @@
           </a:bodyPr>
           <a:lstStyle/>
           <a:p>
-            <a:pPr algn="l" marL="91440" indent="-91440">
+            <a:pPr algn="l" marL="109728" indent="-109728">
               <a:lnSpc>
                 <a:spcPct val="100000"/>
               </a:lnSpc>
@@ -13671,7 +13671,7 @@
             </a:r>
           </a:p>
           <a:p>
-            <a:pPr algn="l" marL="91440" indent="-91440">
+            <a:pPr algn="l" marL="109728" indent="-109728">
               <a:lnSpc>
                 <a:spcPct val="100000"/>
               </a:lnSpc>
@@ -13694,7 +13694,7 @@
             </a:r>
           </a:p>
           <a:p>
-            <a:pPr algn="l" marL="91440" indent="-91440">
+            <a:pPr algn="l" marL="109728" indent="-109728">
               <a:lnSpc>
                 <a:spcPct val="100000"/>
               </a:lnSpc>
@@ -13717,7 +13717,7 @@
             </a:r>
           </a:p>
           <a:p>
-            <a:pPr algn="l" marL="91440" indent="-91440">
+            <a:pPr algn="l" marL="109728" indent="-109728">
               <a:lnSpc>
                 <a:spcPct val="100000"/>
               </a:lnSpc>
@@ -13983,7 +13983,7 @@
           </a:bodyPr>
           <a:lstStyle/>
           <a:p>
-            <a:pPr algn="l" marL="118872" indent="-118872">
+            <a:pPr algn="l" marL="109728" indent="-109728">
               <a:lnSpc>
                 <a:spcPct val="92000"/>
               </a:lnSpc>
@@ -14006,7 +14006,7 @@
             </a:r>
           </a:p>
           <a:p>
-            <a:pPr algn="l" marL="118872" indent="-118872">
+            <a:pPr algn="l" marL="109728" indent="-109728">
               <a:lnSpc>
                 <a:spcPct val="92000"/>
               </a:lnSpc>
@@ -14029,7 +14029,7 @@
             </a:r>
           </a:p>
           <a:p>
-            <a:pPr algn="l" marL="118872" indent="-118872">
+            <a:pPr algn="l" marL="109728" indent="-109728">
               <a:lnSpc>
                 <a:spcPct val="92000"/>
               </a:lnSpc>
@@ -14052,7 +14052,7 @@
             </a:r>
           </a:p>
           <a:p>
-            <a:pPr algn="l" marL="118872" indent="-118872">
+            <a:pPr algn="l" marL="109728" indent="-109728">
               <a:lnSpc>
                 <a:spcPct val="92000"/>
               </a:lnSpc>
@@ -19546,8 +19546,8 @@
         </p:nvSpPr>
         <p:spPr>
           <a:xfrm>
-            <a:off x="3995928" y="1536192"/>
-            <a:ext cx="420624" cy="164592"/>
+            <a:off x="3995928" y="1554480"/>
+            <a:ext cx="420624" cy="128016"/>
           </a:xfrm>
           <a:prstGeom prst="rect">
             <a:avLst/>
@@ -19599,7 +19599,7 @@
           </a:bodyPr>
           <a:lstStyle/>
           <a:p>
-            <a:pPr algn="l" marL="100584" indent="-100584">
+            <a:pPr algn="l" marL="109728" indent="-109728">
               <a:lnSpc>
                 <a:spcPct val="92000"/>
               </a:lnSpc>
@@ -19622,7 +19622,7 @@
             </a:r>
           </a:p>
           <a:p>
-            <a:pPr algn="l" marL="100584" indent="-100584">
+            <a:pPr algn="l" marL="109728" indent="-109728">
               <a:lnSpc>
                 <a:spcPct val="92000"/>
               </a:lnSpc>
@@ -19645,7 +19645,7 @@
             </a:r>
           </a:p>
           <a:p>
-            <a:pPr algn="l" marL="100584" indent="-100584">
+            <a:pPr algn="l" marL="109728" indent="-109728">
               <a:lnSpc>
                 <a:spcPct val="92000"/>
               </a:lnSpc>
@@ -19962,8 +19962,8 @@
         </p:nvSpPr>
         <p:spPr>
           <a:xfrm>
-            <a:off x="8293608" y="1536192"/>
-            <a:ext cx="420624" cy="164592"/>
+            <a:off x="8293608" y="1554480"/>
+            <a:ext cx="420624" cy="128016"/>
           </a:xfrm>
           <a:prstGeom prst="rect">
             <a:avLst/>
@@ -20015,7 +20015,7 @@
           </a:bodyPr>
           <a:lstStyle/>
           <a:p>
-            <a:pPr algn="l" marL="100584" indent="-100584">
+            <a:pPr algn="l" marL="109728" indent="-109728">
               <a:lnSpc>
                 <a:spcPct val="92000"/>
               </a:lnSpc>
@@ -20038,7 +20038,7 @@
             </a:r>
           </a:p>
           <a:p>
-            <a:pPr algn="l" marL="100584" indent="-100584">
+            <a:pPr algn="l" marL="109728" indent="-109728">
               <a:lnSpc>
                 <a:spcPct val="92000"/>
               </a:lnSpc>
@@ -20061,7 +20061,7 @@
             </a:r>
           </a:p>
           <a:p>
-            <a:pPr algn="l" marL="100584" indent="-100584">
+            <a:pPr algn="l" marL="109728" indent="-109728">
               <a:lnSpc>
                 <a:spcPct val="92000"/>
               </a:lnSpc>
@@ -20378,8 +20378,8 @@
         </p:nvSpPr>
         <p:spPr>
           <a:xfrm>
-            <a:off x="3995928" y="4137660"/>
-            <a:ext cx="420624" cy="164592"/>
+            <a:off x="3995928" y="4155948"/>
+            <a:ext cx="420624" cy="128016"/>
           </a:xfrm>
           <a:prstGeom prst="rect">
             <a:avLst/>
@@ -20431,7 +20431,7 @@
           </a:bodyPr>
           <a:lstStyle/>
           <a:p>
-            <a:pPr algn="l" marL="100584" indent="-100584">
+            <a:pPr algn="l" marL="109728" indent="-109728">
               <a:lnSpc>
                 <a:spcPct val="92000"/>
               </a:lnSpc>
@@ -20454,7 +20454,7 @@
             </a:r>
           </a:p>
           <a:p>
-            <a:pPr algn="l" marL="100584" indent="-100584">
+            <a:pPr algn="l" marL="109728" indent="-109728">
               <a:lnSpc>
                 <a:spcPct val="92000"/>
               </a:lnSpc>
@@ -20477,7 +20477,7 @@
             </a:r>
           </a:p>
           <a:p>
-            <a:pPr algn="l" marL="100584" indent="-100584">
+            <a:pPr algn="l" marL="109728" indent="-109728">
               <a:lnSpc>
                 <a:spcPct val="92000"/>
               </a:lnSpc>
@@ -20794,8 +20794,8 @@
         </p:nvSpPr>
         <p:spPr>
           <a:xfrm>
-            <a:off x="8293608" y="4137660"/>
-            <a:ext cx="420624" cy="164592"/>
+            <a:off x="8293608" y="4155948"/>
+            <a:ext cx="420624" cy="128016"/>
           </a:xfrm>
           <a:prstGeom prst="rect">
             <a:avLst/>
@@ -20847,7 +20847,7 @@
           </a:bodyPr>
           <a:lstStyle/>
           <a:p>
-            <a:pPr algn="l" marL="100584" indent="-100584">
+            <a:pPr algn="l" marL="109728" indent="-109728">
               <a:lnSpc>
                 <a:spcPct val="92000"/>
               </a:lnSpc>
@@ -20870,7 +20870,7 @@
             </a:r>
           </a:p>
           <a:p>
-            <a:pPr algn="l" marL="100584" indent="-100584">
+            <a:pPr algn="l" marL="109728" indent="-109728">
               <a:lnSpc>
                 <a:spcPct val="92000"/>
               </a:lnSpc>
@@ -21021,7 +21021,7 @@
           </a:bodyPr>
           <a:lstStyle/>
           <a:p>
-            <a:pPr algn="l" marL="118872" indent="-118872">
+            <a:pPr algn="l" marL="109728" indent="-109728">
               <a:lnSpc>
                 <a:spcPct val="92000"/>
               </a:lnSpc>
@@ -21044,7 +21044,7 @@
             </a:r>
           </a:p>
           <a:p>
-            <a:pPr algn="l" marL="118872" indent="-118872">
+            <a:pPr algn="l" marL="109728" indent="-109728">
               <a:lnSpc>
                 <a:spcPct val="92000"/>
               </a:lnSpc>
@@ -21067,7 +21067,7 @@
             </a:r>
           </a:p>
           <a:p>
-            <a:pPr algn="l" marL="118872" indent="-118872">
+            <a:pPr algn="l" marL="109728" indent="-109728">
               <a:lnSpc>
                 <a:spcPct val="92000"/>
               </a:lnSpc>
@@ -21090,7 +21090,7 @@
             </a:r>
           </a:p>
           <a:p>
-            <a:pPr algn="l" marL="118872" indent="-118872">
+            <a:pPr algn="l" marL="109728" indent="-109728">
               <a:lnSpc>
                 <a:spcPct val="92000"/>
               </a:lnSpc>
@@ -26138,7 +26138,7 @@
           </a:bodyPr>
           <a:lstStyle/>
           <a:p>
-            <a:pPr algn="l" marL="118872" indent="-118872">
+            <a:pPr algn="l" marL="109728" indent="-109728">
               <a:lnSpc>
                 <a:spcPct val="92000"/>
               </a:lnSpc>
@@ -26161,7 +26161,7 @@
             </a:r>
           </a:p>
           <a:p>
-            <a:pPr algn="l" marL="118872" indent="-118872">
+            <a:pPr algn="l" marL="109728" indent="-109728">
               <a:lnSpc>
                 <a:spcPct val="92000"/>
               </a:lnSpc>
@@ -26184,7 +26184,7 @@
             </a:r>
           </a:p>
           <a:p>
-            <a:pPr algn="l" marL="118872" indent="-118872">
+            <a:pPr algn="l" marL="109728" indent="-109728">
               <a:lnSpc>
                 <a:spcPct val="92000"/>
               </a:lnSpc>
@@ -31940,7 +31940,7 @@
           </a:bodyPr>
           <a:lstStyle/>
           <a:p>
-            <a:pPr algn="l" marL="118872" indent="-118872">
+            <a:pPr algn="l" marL="109728" indent="-109728">
               <a:lnSpc>
                 <a:spcPct val="92000"/>
               </a:lnSpc>
@@ -31963,7 +31963,7 @@
             </a:r>
           </a:p>
           <a:p>
-            <a:pPr algn="l" marL="118872" indent="-118872">
+            <a:pPr algn="l" marL="109728" indent="-109728">
               <a:lnSpc>
                 <a:spcPct val="92000"/>
               </a:lnSpc>
@@ -31986,7 +31986,7 @@
             </a:r>
           </a:p>
           <a:p>
-            <a:pPr algn="l" marL="118872" indent="-118872">
+            <a:pPr algn="l" marL="109728" indent="-109728">
               <a:lnSpc>
                 <a:spcPct val="92000"/>
               </a:lnSpc>
@@ -32009,7 +32009,7 @@
             </a:r>
           </a:p>
           <a:p>
-            <a:pPr algn="l" marL="118872" indent="-118872">
+            <a:pPr algn="l" marL="109728" indent="-109728">
               <a:lnSpc>
                 <a:spcPct val="92000"/>
               </a:lnSpc>
